--- a/MECH191_metallurgy/slideDecks/pptx/MECH191_Week11_Lecture.pptx
+++ b/MECH191_metallurgy/slideDecks/pptx/MECH191_Week11_Lecture.pptx
@@ -15122,7 +15122,7 @@
         </p:spPr>
         <p:txBody>
           <a:bodyPr wrap="none" lIns="0" rIns="0" tIns="0" bIns="0">
-            <a:spAutoFit/>
+            <a:noAutofit/>
           </a:bodyPr>
           <a:lstStyle/>
           <a:p>
@@ -15133,7 +15133,7 @@
                 </a:solidFill>
                 <a:latin typeface="Calibri"/>
               </a:rPr>
-              <a:t>Metallography Lab — Module 10</a:t>
+              <a:t>Alloy Research Portfolio — Module 10</a:t>
             </a:r>
           </a:p>
         </p:txBody>
@@ -15156,7 +15156,7 @@
         </p:spPr>
         <p:txBody>
           <a:bodyPr wrap="none" lIns="0" rIns="0" tIns="0" bIns="0">
-            <a:spAutoFit/>
+            <a:noAutofit/>
           </a:bodyPr>
           <a:lstStyle/>
           <a:p>
@@ -15167,7 +15167,7 @@
                 </a:solidFill>
                 <a:latin typeface="Calibri"/>
               </a:rPr>
-              <a:t>EXAMET-5-R-600-HD  ·  50–500×</a:t>
+              <a:t>No Microscope Required</a:t>
             </a:r>
           </a:p>
         </p:txBody>
@@ -15292,7 +15292,7 @@
         </p:spPr>
         <p:txBody>
           <a:bodyPr wrap="none" lIns="0" rIns="0" tIns="0" bIns="0">
-            <a:spAutoFit/>
+            <a:noAutofit/>
           </a:bodyPr>
           <a:lstStyle/>
           <a:p>
@@ -15303,7 +15303,7 @@
                 </a:solidFill>
                 <a:latin typeface="Calibri"/>
               </a:rPr>
-              <a:t>Compare precipitate presence (G, heat-treatable) vs. absence (I, solid-</a:t>
+              <a:t>Research 6061-T6 vs. 5086 aluminum: precipitate structure, weldability,</a:t>
             </a:r>
           </a:p>
         </p:txBody>
@@ -15326,7 +15326,7 @@
         </p:spPr>
         <p:txBody>
           <a:bodyPr wrap="none" lIns="0" rIns="0" tIns="0" bIns="0">
-            <a:spAutoFit/>
+            <a:noAutofit/>
           </a:bodyPr>
           <a:lstStyle/>
           <a:p>
@@ -15337,7 +15337,7 @@
                 </a:solidFill>
                 <a:latin typeface="Calibri"/>
               </a:rPr>
-              <a:t>solution only) at 500×.</a:t>
+              <a:t>and published HV for your Hardness Log.</a:t>
             </a:r>
           </a:p>
         </p:txBody>
@@ -15394,7 +15394,7 @@
         </p:spPr>
         <p:txBody>
           <a:bodyPr wrap="none" lIns="0" rIns="0" tIns="0" bIns="0">
-            <a:spAutoFit/>
+            <a:noAutofit/>
           </a:bodyPr>
           <a:lstStyle/>
           <a:p>
@@ -15405,7 +15405,7 @@
                 </a:solidFill>
                 <a:latin typeface="Calibri"/>
               </a:rPr>
-              <a:t>1  Observe — complete feature table</a:t>
+              <a:t>1  Research — record data &amp; sources</a:t>
             </a:r>
           </a:p>
         </p:txBody>
@@ -15428,7 +15428,7 @@
         </p:spPr>
         <p:txBody>
           <a:bodyPr wrap="none" lIns="0" rIns="0" tIns="0" bIns="0">
-            <a:spAutoFit/>
+            <a:noAutofit/>
           </a:bodyPr>
           <a:lstStyle/>
           <a:p>
@@ -15439,7 +15439,7 @@
                 </a:solidFill>
                 <a:latin typeface="Calibri"/>
               </a:rPr>
-              <a:t>2  Sketch — label magnification &amp; specimen</a:t>
+              <a:t>2  Answer — short-answer questions</a:t>
             </a:r>
           </a:p>
         </p:txBody>
@@ -15462,7 +15462,7 @@
         </p:spPr>
         <p:txBody>
           <a:bodyPr wrap="none" lIns="0" rIns="0" tIns="0" bIns="0">
-            <a:spAutoFit/>
+            <a:noAutofit/>
           </a:bodyPr>
           <a:lstStyle/>
           <a:p>
@@ -15473,7 +15473,7 @@
                 </a:solidFill>
                 <a:latin typeface="Calibri"/>
               </a:rPr>
-              <a:t>3  Answer — 4 short questions</a:t>
+              <a:t>3  Apply — critical-thinking &amp; equations</a:t>
             </a:r>
           </a:p>
         </p:txBody>
@@ -15507,7 +15507,7 @@
                 </a:solidFill>
                 <a:latin typeface="Calibri"/>
               </a:rPr>
-              <a:t>Specimens to Check Out</a:t>
+              <a:t>Alloys of Record</a:t>
             </a:r>
           </a:p>
         </p:txBody>
@@ -15541,7 +15541,7 @@
                 </a:solidFill>
                 <a:latin typeface="Calibri"/>
               </a:rPr>
-              <a:t>· Specimen G — 6061-T6 aluminum (revisit)</a:t>
+              <a:t>· Alloy G — 6061-T6 aluminum (revisit)</a:t>
             </a:r>
           </a:p>
         </p:txBody>
@@ -15575,7 +15575,7 @@
                 </a:solidFill>
                 <a:latin typeface="Calibri"/>
               </a:rPr>
-              <a:t>· Specimen I — 5086 aluminum</a:t>
+              <a:t>· Alloy I — 5086 aluminum</a:t>
             </a:r>
           </a:p>
         </p:txBody>
@@ -15598,7 +15598,7 @@
         </p:spPr>
         <p:txBody>
           <a:bodyPr wrap="none" lIns="0" rIns="0" tIns="0" bIns="0">
-            <a:spAutoFit/>
+            <a:noAutofit/>
           </a:bodyPr>
           <a:lstStyle/>
           <a:p>
@@ -15609,7 +15609,7 @@
                 </a:solidFill>
                 <a:latin typeface="Calibri"/>
               </a:rPr>
-              <a:t>How to check out the kit:</a:t>
+              <a:t>How to Complete This Module:</a:t>
             </a:r>
           </a:p>
         </p:txBody>
@@ -15632,7 +15632,7 @@
         </p:spPr>
         <p:txBody>
           <a:bodyPr wrap="none" lIns="0" rIns="0" tIns="0" bIns="0">
-            <a:spAutoFit/>
+            <a:noAutofit/>
           </a:bodyPr>
           <a:lstStyle/>
           <a:p>
@@ -15643,7 +15643,7 @@
                 </a:solidFill>
                 <a:latin typeface="Calibri"/>
               </a:rPr>
-              <a:t>1  See instructor after class today</a:t>
+              <a:t>1  Research the alloy(s) using credible sources</a:t>
             </a:r>
           </a:p>
         </p:txBody>
@@ -15666,7 +15666,7 @@
         </p:spPr>
         <p:txBody>
           <a:bodyPr wrap="none" lIns="0" rIns="0" tIns="0" bIns="0">
-            <a:spAutoFit/>
+            <a:noAutofit/>
           </a:bodyPr>
           <a:lstStyle/>
           <a:p>
@@ -15677,7 +15677,7 @@
                 </a:solidFill>
                 <a:latin typeface="Calibri"/>
               </a:rPr>
-              <a:t>2  Sign out the specimen tray</a:t>
+              <a:t>2  Record data with a source citation</a:t>
             </a:r>
           </a:p>
         </p:txBody>
@@ -15700,7 +15700,7 @@
         </p:spPr>
         <p:txBody>
           <a:bodyPr wrap="none" lIns="0" rIns="0" tIns="0" bIns="0">
-            <a:spAutoFit/>
+            <a:noAutofit/>
           </a:bodyPr>
           <a:lstStyle/>
           <a:p>
@@ -15711,7 +15711,7 @@
                 </a:solidFill>
                 <a:latin typeface="Calibri"/>
               </a:rPr>
-              <a:t>3  Use the EXAMET-5 at your convenience</a:t>
+              <a:t>3  Answer the short-answer questions</a:t>
             </a:r>
           </a:p>
         </p:txBody>
@@ -15734,7 +15734,7 @@
         </p:spPr>
         <p:txBody>
           <a:bodyPr wrap="none" lIns="0" rIns="0" tIns="0" bIns="0">
-            <a:spAutoFit/>
+            <a:noAutofit/>
           </a:bodyPr>
           <a:lstStyle/>
           <a:p>
@@ -15745,7 +15745,7 @@
                 </a:solidFill>
                 <a:latin typeface="Calibri"/>
               </a:rPr>
-              <a:t>4  Return kit before leaving class</a:t>
+              <a:t>4  Answer the critical-thinking questions</a:t>
             </a:r>
           </a:p>
         </p:txBody>
@@ -15768,7 +15768,7 @@
         </p:spPr>
         <p:txBody>
           <a:bodyPr wrap="none" lIns="0" rIns="0" tIns="0" bIns="0">
-            <a:spAutoFit/>
+            <a:noAutofit/>
           </a:bodyPr>
           <a:lstStyle/>
           <a:p>
@@ -15779,7 +15779,7 @@
                 </a:solidFill>
                 <a:latin typeface="Calibri"/>
               </a:rPr>
-              <a:t>5  Submit completed module with your portfolio</a:t>
+              <a:t>5  Keep the module with your portfolio</a:t>
             </a:r>
           </a:p>
         </p:txBody>
